--- a/presentations/04-tool-calling-with-spring-ai.pptx
+++ b/presentations/04-tool-calling-with-spring-ai.pptx
@@ -3433,45 +3433,6 @@
           </a:p>
         </p:txBody>
       </p:sp>
-      <p:sp>
-        <p:nvSpPr>
-          <p:cNvPr id="15" name="Text 13"/>
-          <p:cNvSpPr/>
-          <p:nvPr/>
-        </p:nvSpPr>
-        <p:spPr>
-          <a:xfrm>
-            <a:off x="548640" y="5815584"/>
-            <a:ext cx="11064240" cy="448056"/>
-          </a:xfrm>
-          <a:prstGeom prst="rect">
-            <a:avLst/>
-          </a:prstGeom>
-          <a:noFill/>
-          <a:ln/>
-        </p:spPr>
-        <p:txBody>
-          <a:bodyPr wrap="square" lIns="0" tIns="0" rIns="0" bIns="0" rtlCol="0" anchor="t"/>
-          <a:lstStyle/>
-          <a:p>
-            <a:pPr marL="0" indent="0">
-              <a:buNone/>
-            </a:pPr>
-            <a:r>
-              <a:rPr lang="en-US" sz="1800" b="1" dirty="0">
-                <a:solidFill>
-                  <a:srgbClr val="397C25"/>
-                </a:solidFill>
-                <a:latin typeface="Calibri" pitchFamily="34" charset="0"/>
-                <a:ea typeface="Calibri" pitchFamily="34" charset="-122"/>
-                <a:cs typeface="Calibri" pitchFamily="34" charset="-120"/>
-              </a:rPr>
-              <a:t>Narrow capabilities are easier to describe, validate, and test.</a:t>
-            </a:r>
-            <a:endParaRPr lang="en-US" sz="1800" dirty="0"/>
-          </a:p>
-        </p:txBody>
-      </p:sp>
     </p:spTree>
   </p:cSld>
   <p:clrMapOvr>
@@ -4128,45 +4089,6 @@
           </a:p>
         </p:txBody>
       </p:sp>
-      <p:sp>
-        <p:nvSpPr>
-          <p:cNvPr id="15" name="Text 13"/>
-          <p:cNvSpPr/>
-          <p:nvPr/>
-        </p:nvSpPr>
-        <p:spPr>
-          <a:xfrm>
-            <a:off x="548640" y="5815584"/>
-            <a:ext cx="11064240" cy="448056"/>
-          </a:xfrm>
-          <a:prstGeom prst="rect">
-            <a:avLst/>
-          </a:prstGeom>
-          <a:noFill/>
-          <a:ln/>
-        </p:spPr>
-        <p:txBody>
-          <a:bodyPr wrap="square" lIns="0" tIns="0" rIns="0" bIns="0" rtlCol="0" anchor="t"/>
-          <a:lstStyle/>
-          <a:p>
-            <a:pPr marL="0" indent="0">
-              <a:buNone/>
-            </a:pPr>
-            <a:r>
-              <a:rPr lang="en-US" sz="1800" b="1" dirty="0">
-                <a:solidFill>
-                  <a:srgbClr val="397C25"/>
-                </a:solidFill>
-                <a:latin typeface="Calibri" pitchFamily="34" charset="0"/>
-                <a:ea typeface="Calibri" pitchFamily="34" charset="-122"/>
-                <a:cs typeface="Calibri" pitchFamily="34" charset="-120"/>
-              </a:rPr>
-              <a:t>Use the demo to teach orchestration, not current weather or city availability.</a:t>
-            </a:r>
-            <a:endParaRPr lang="en-US" sz="1800" dirty="0"/>
-          </a:p>
-        </p:txBody>
-      </p:sp>
     </p:spTree>
   </p:cSld>
   <p:clrMapOvr>
@@ -4803,45 +4725,6 @@
           </a:p>
         </p:txBody>
       </p:sp>
-      <p:sp>
-        <p:nvSpPr>
-          <p:cNvPr id="15" name="Text 13"/>
-          <p:cNvSpPr/>
-          <p:nvPr/>
-        </p:nvSpPr>
-        <p:spPr>
-          <a:xfrm>
-            <a:off x="548640" y="5815584"/>
-            <a:ext cx="11064240" cy="448056"/>
-          </a:xfrm>
-          <a:prstGeom prst="rect">
-            <a:avLst/>
-          </a:prstGeom>
-          <a:noFill/>
-          <a:ln/>
-        </p:spPr>
-        <p:txBody>
-          <a:bodyPr wrap="square" lIns="0" tIns="0" rIns="0" bIns="0" rtlCol="0" anchor="t"/>
-          <a:lstStyle/>
-          <a:p>
-            <a:pPr marL="0" indent="0">
-              <a:buNone/>
-            </a:pPr>
-            <a:r>
-              <a:rPr lang="en-US" sz="1800" b="1" dirty="0">
-                <a:solidFill>
-                  <a:srgbClr val="397C25"/>
-                </a:solidFill>
-                <a:latin typeface="Calibri" pitchFamily="34" charset="0"/>
-                <a:ea typeface="Calibri" pitchFamily="34" charset="-122"/>
-                <a:cs typeface="Calibri" pitchFamily="34" charset="-120"/>
-              </a:rPr>
-              <a:t>100 Fahrenheit converts to 37.8 Celsius after the tool's display rounding.</a:t>
-            </a:r>
-            <a:endParaRPr lang="en-US" sz="1800" dirty="0"/>
-          </a:p>
-        </p:txBody>
-      </p:sp>
     </p:spTree>
   </p:cSld>
   <p:clrMapOvr>
@@ -6234,45 +6117,6 @@
           </a:p>
         </p:txBody>
       </p:sp>
-      <p:sp>
-        <p:nvSpPr>
-          <p:cNvPr id="41" name="Text 38"/>
-          <p:cNvSpPr/>
-          <p:nvPr/>
-        </p:nvSpPr>
-        <p:spPr>
-          <a:xfrm>
-            <a:off x="548640" y="5815584"/>
-            <a:ext cx="11064240" cy="448056"/>
-          </a:xfrm>
-          <a:prstGeom prst="rect">
-            <a:avLst/>
-          </a:prstGeom>
-          <a:noFill/>
-          <a:ln/>
-        </p:spPr>
-        <p:txBody>
-          <a:bodyPr wrap="square" lIns="0" tIns="0" rIns="0" bIns="0" rtlCol="0" anchor="t"/>
-          <a:lstStyle/>
-          <a:p>
-            <a:pPr marL="0" indent="0">
-              <a:buNone/>
-            </a:pPr>
-            <a:r>
-              <a:rPr lang="en-US" sz="1800" b="1" dirty="0">
-                <a:solidFill>
-                  <a:srgbClr val="397C25"/>
-                </a:solidFill>
-                <a:latin typeface="Calibri" pitchFamily="34" charset="0"/>
-                <a:ea typeface="Calibri" pitchFamily="34" charset="-122"/>
-                <a:cs typeface="Calibri" pitchFamily="34" charset="-120"/>
-              </a:rPr>
-              <a:t>The tools do not call each other. The model selects each call after receiving the preceding result.</a:t>
-            </a:r>
-            <a:endParaRPr lang="en-US" sz="1800" dirty="0"/>
-          </a:p>
-        </p:txBody>
-      </p:sp>
     </p:spTree>
   </p:cSld>
   <p:clrMapOvr>
@@ -6949,45 +6793,6 @@
           </a:p>
         </p:txBody>
       </p:sp>
-      <p:sp>
-        <p:nvSpPr>
-          <p:cNvPr id="15" name="Text 13"/>
-          <p:cNvSpPr/>
-          <p:nvPr/>
-        </p:nvSpPr>
-        <p:spPr>
-          <a:xfrm>
-            <a:off x="548640" y="5815584"/>
-            <a:ext cx="11064240" cy="448056"/>
-          </a:xfrm>
-          <a:prstGeom prst="rect">
-            <a:avLst/>
-          </a:prstGeom>
-          <a:noFill/>
-          <a:ln/>
-        </p:spPr>
-        <p:txBody>
-          <a:bodyPr wrap="square" lIns="0" tIns="0" rIns="0" bIns="0" rtlCol="0" anchor="t"/>
-          <a:lstStyle/>
-          <a:p>
-            <a:pPr marL="0" indent="0">
-              <a:buNone/>
-            </a:pPr>
-            <a:r>
-              <a:rPr lang="en-US" sz="1800" b="1" dirty="0">
-                <a:solidFill>
-                  <a:srgbClr val="397C25"/>
-                </a:solidFill>
-                <a:latin typeface="Calibri" pitchFamily="34" charset="0"/>
-                <a:ea typeface="Calibri" pitchFamily="34" charset="-122"/>
-                <a:cs typeface="Calibri" pitchFamily="34" charset="-120"/>
-              </a:rPr>
-              <a:t>The recorder proves calls and arguments. Verifying result reuse also requires the raw tool output.</a:t>
-            </a:r>
-            <a:endParaRPr lang="en-US" sz="1800" dirty="0"/>
-          </a:p>
-        </p:txBody>
-      </p:sp>
     </p:spTree>
   </p:cSld>
   <p:clrMapOvr>
@@ -7675,45 +7480,6 @@
           </a:p>
         </p:txBody>
       </p:sp>
-      <p:sp>
-        <p:nvSpPr>
-          <p:cNvPr id="15" name="Text 13"/>
-          <p:cNvSpPr/>
-          <p:nvPr/>
-        </p:nvSpPr>
-        <p:spPr>
-          <a:xfrm>
-            <a:off x="548640" y="5815584"/>
-            <a:ext cx="11064240" cy="448056"/>
-          </a:xfrm>
-          <a:prstGeom prst="rect">
-            <a:avLst/>
-          </a:prstGeom>
-          <a:noFill/>
-          <a:ln/>
-        </p:spPr>
-        <p:txBody>
-          <a:bodyPr wrap="square" lIns="0" tIns="0" rIns="0" bIns="0" rtlCol="0" anchor="t"/>
-          <a:lstStyle/>
-          <a:p>
-            <a:pPr marL="0" indent="0">
-              <a:buNone/>
-            </a:pPr>
-            <a:r>
-              <a:rPr lang="en-US" sz="1800" b="1" dirty="0">
-                <a:solidFill>
-                  <a:srgbClr val="397C25"/>
-                </a:solidFill>
-                <a:latin typeface="Calibri" pitchFamily="34" charset="0"/>
-                <a:ea typeface="Calibri" pitchFamily="34" charset="-122"/>
-                <a:cs typeface="Calibri" pitchFamily="34" charset="-120"/>
-              </a:rPr>
-              <a:t>This service uses ChatMemory directly, not a memory advisor.</a:t>
-            </a:r>
-            <a:endParaRPr lang="en-US" sz="1800" dirty="0"/>
-          </a:p>
-        </p:txBody>
-      </p:sp>
     </p:spTree>
   </p:cSld>
   <p:clrMapOvr>
@@ -8421,45 +8187,6 @@
           </a:p>
         </p:txBody>
       </p:sp>
-      <p:sp>
-        <p:nvSpPr>
-          <p:cNvPr id="15" name="Text 13"/>
-          <p:cNvSpPr/>
-          <p:nvPr/>
-        </p:nvSpPr>
-        <p:spPr>
-          <a:xfrm>
-            <a:off x="548640" y="5815584"/>
-            <a:ext cx="11064240" cy="448056"/>
-          </a:xfrm>
-          <a:prstGeom prst="rect">
-            <a:avLst/>
-          </a:prstGeom>
-          <a:noFill/>
-          <a:ln/>
-        </p:spPr>
-        <p:txBody>
-          <a:bodyPr wrap="square" lIns="0" tIns="0" rIns="0" bIns="0" rtlCol="0" anchor="t"/>
-          <a:lstStyle/>
-          <a:p>
-            <a:pPr marL="0" indent="0">
-              <a:buNone/>
-            </a:pPr>
-            <a:r>
-              <a:rPr lang="en-US" sz="1800" b="1" dirty="0">
-                <a:solidFill>
-                  <a:srgbClr val="397C25"/>
-                </a:solidFill>
-                <a:latin typeface="Calibri" pitchFamily="34" charset="0"/>
-                <a:ea typeface="Calibri" pitchFamily="34" charset="-122"/>
-                <a:cs typeface="Calibri" pitchFamily="34" charset="-120"/>
-              </a:rPr>
-              <a:t>Do not assume every exception automatically becomes a model-visible retry.</a:t>
-            </a:r>
-            <a:endParaRPr lang="en-US" sz="1800" dirty="0"/>
-          </a:p>
-        </p:txBody>
-      </p:sp>
     </p:spTree>
   </p:cSld>
   <p:clrMapOvr>
@@ -9628,45 +9355,6 @@
           </a:p>
         </p:txBody>
       </p:sp>
-      <p:sp>
-        <p:nvSpPr>
-          <p:cNvPr id="35" name="Text 31"/>
-          <p:cNvSpPr/>
-          <p:nvPr/>
-        </p:nvSpPr>
-        <p:spPr>
-          <a:xfrm>
-            <a:off x="548640" y="5815584"/>
-            <a:ext cx="11064240" cy="448056"/>
-          </a:xfrm>
-          <a:prstGeom prst="rect">
-            <a:avLst/>
-          </a:prstGeom>
-          <a:noFill/>
-          <a:ln/>
-        </p:spPr>
-        <p:txBody>
-          <a:bodyPr wrap="square" lIns="0" tIns="0" rIns="0" bIns="0" rtlCol="0" anchor="t"/>
-          <a:lstStyle/>
-          <a:p>
-            <a:pPr marL="0" indent="0">
-              <a:buNone/>
-            </a:pPr>
-            <a:r>
-              <a:rPr lang="en-US" sz="1800" b="1" dirty="0">
-                <a:solidFill>
-                  <a:srgbClr val="397C25"/>
-                </a:solidFill>
-                <a:latin typeface="Calibri" pitchFamily="34" charset="0"/>
-                <a:ea typeface="Calibri" pitchFamily="34" charset="-122"/>
-                <a:cs typeface="Calibri" pitchFamily="34" charset="-120"/>
-              </a:rPr>
-              <a:t>Spring AI dispatches the tool call and returns its result to the model before the final reply.</a:t>
-            </a:r>
-            <a:endParaRPr lang="en-US" sz="1800" dirty="0"/>
-          </a:p>
-        </p:txBody>
-      </p:sp>
     </p:spTree>
   </p:cSld>
   <p:clrMapOvr>
@@ -10114,45 +9802,6 @@
           </a:p>
         </p:txBody>
       </p:sp>
-      <p:sp>
-        <p:nvSpPr>
-          <p:cNvPr id="13" name="Text 10"/>
-          <p:cNvSpPr/>
-          <p:nvPr/>
-        </p:nvSpPr>
-        <p:spPr>
-          <a:xfrm>
-            <a:off x="548640" y="5815584"/>
-            <a:ext cx="11064240" cy="448056"/>
-          </a:xfrm>
-          <a:prstGeom prst="rect">
-            <a:avLst/>
-          </a:prstGeom>
-          <a:noFill/>
-          <a:ln/>
-        </p:spPr>
-        <p:txBody>
-          <a:bodyPr wrap="square" lIns="0" tIns="0" rIns="0" bIns="0" rtlCol="0" anchor="t"/>
-          <a:lstStyle/>
-          <a:p>
-            <a:pPr marL="0" indent="0">
-              <a:buNone/>
-            </a:pPr>
-            <a:r>
-              <a:rPr lang="en-US" sz="1800" b="1" dirty="0">
-                <a:solidFill>
-                  <a:srgbClr val="397C25"/>
-                </a:solidFill>
-                <a:latin typeface="Calibri" pitchFamily="34" charset="0"/>
-                <a:ea typeface="Calibri" pitchFamily="34" charset="-122"/>
-                <a:cs typeface="Calibri" pitchFamily="34" charset="-120"/>
-              </a:rPr>
-              <a:t>Register @Tool instances explicitly; annotations describe capabilities, not permissions.</a:t>
-            </a:r>
-            <a:endParaRPr lang="en-US" sz="1800" dirty="0"/>
-          </a:p>
-        </p:txBody>
-      </p:sp>
     </p:spTree>
   </p:cSld>
   <p:clrMapOvr>
@@ -10795,45 +10444,6 @@
           </a:p>
         </p:txBody>
       </p:sp>
-      <p:sp>
-        <p:nvSpPr>
-          <p:cNvPr id="18" name="Text 16"/>
-          <p:cNvSpPr/>
-          <p:nvPr/>
-        </p:nvSpPr>
-        <p:spPr>
-          <a:xfrm>
-            <a:off x="548640" y="5815584"/>
-            <a:ext cx="11064240" cy="448056"/>
-          </a:xfrm>
-          <a:prstGeom prst="rect">
-            <a:avLst/>
-          </a:prstGeom>
-          <a:noFill/>
-          <a:ln/>
-        </p:spPr>
-        <p:txBody>
-          <a:bodyPr wrap="square" lIns="0" tIns="0" rIns="0" bIns="0" rtlCol="0" anchor="t"/>
-          <a:lstStyle/>
-          <a:p>
-            <a:pPr marL="0" indent="0">
-              <a:buNone/>
-            </a:pPr>
-            <a:r>
-              <a:rPr lang="en-US" sz="1800" b="1" dirty="0">
-                <a:solidFill>
-                  <a:srgbClr val="397C25"/>
-                </a:solidFill>
-                <a:latin typeface="Calibri" pitchFamily="34" charset="0"/>
-                <a:ea typeface="Calibri" pitchFamily="34" charset="-122"/>
-                <a:cs typeface="Calibri" pitchFamily="34" charset="-120"/>
-              </a:rPr>
-              <a:t>Judge the recorded methods and data flow, not exact wording or randomized weather.</a:t>
-            </a:r>
-            <a:endParaRPr lang="en-US" sz="1800" dirty="0"/>
-          </a:p>
-        </p:txBody>
-      </p:sp>
     </p:spTree>
   </p:cSld>
   <p:clrMapOvr>
@@ -11669,45 +11279,6 @@
           </a:p>
         </p:txBody>
       </p:sp>
-      <p:sp>
-        <p:nvSpPr>
-          <p:cNvPr id="25" name="Text 21"/>
-          <p:cNvSpPr/>
-          <p:nvPr/>
-        </p:nvSpPr>
-        <p:spPr>
-          <a:xfrm>
-            <a:off x="548640" y="5815584"/>
-            <a:ext cx="11064240" cy="448056"/>
-          </a:xfrm>
-          <a:prstGeom prst="rect">
-            <a:avLst/>
-          </a:prstGeom>
-          <a:noFill/>
-          <a:ln/>
-        </p:spPr>
-        <p:txBody>
-          <a:bodyPr wrap="square" lIns="0" tIns="0" rIns="0" bIns="0" rtlCol="0" anchor="t"/>
-          <a:lstStyle/>
-          <a:p>
-            <a:pPr marL="0" indent="0">
-              <a:buNone/>
-            </a:pPr>
-            <a:r>
-              <a:rPr lang="en-US" sz="1800" b="1" dirty="0">
-                <a:solidFill>
-                  <a:srgbClr val="397C25"/>
-                </a:solidFill>
-                <a:latin typeface="Calibri" pitchFamily="34" charset="0"/>
-                <a:ea typeface="Calibri" pitchFamily="34" charset="-122"/>
-                <a:cs typeface="Calibri" pitchFamily="34" charset="-120"/>
-              </a:rPr>
-              <a:t>Illustrative mock result. Weather data comes from the Java tool, not from model training.</a:t>
-            </a:r>
-            <a:endParaRPr lang="en-US" sz="1800" dirty="0"/>
-          </a:p>
-        </p:txBody>
-      </p:sp>
     </p:spTree>
   </p:cSld>
   <p:clrMapOvr>
@@ -11782,14 +11353,98 @@
       </p:sp>
       <p:sp>
         <p:nvSpPr>
-          <p:cNvPr id="3" name="Text 1"/>
-          <p:cNvSpPr/>
-          <p:nvPr/>
-        </p:nvSpPr>
-        <p:spPr>
-          <a:xfrm>
-            <a:off x="548640" y="950976"/>
-            <a:ext cx="10972800" cy="1197864"/>
+          <p:cNvPr id="9" name="Text 6"/>
+          <p:cNvSpPr/>
+          <p:nvPr/>
+        </p:nvSpPr>
+        <p:spPr>
+          <a:xfrm>
+            <a:off x="548640" y="6400800"/>
+            <a:ext cx="9875520" cy="210312"/>
+          </a:xfrm>
+          <a:prstGeom prst="rect">
+            <a:avLst/>
+          </a:prstGeom>
+          <a:noFill/>
+          <a:ln/>
+        </p:spPr>
+        <p:txBody>
+          <a:bodyPr wrap="square" lIns="0" tIns="0" rIns="0" bIns="0" rtlCol="0" anchor="t"/>
+          <a:lstStyle/>
+          <a:p>
+            <a:pPr marL="0" indent="0">
+              <a:buNone/>
+            </a:pPr>
+            <a:r>
+              <a:rPr lang="en-US" sz="1050" dirty="0">
+                <a:solidFill>
+                  <a:srgbClr val="B9CBB9"/>
+                </a:solidFill>
+                <a:latin typeface="Calibri" pitchFamily="34" charset="0"/>
+                <a:ea typeface="Calibri" pitchFamily="34" charset="-122"/>
+                <a:cs typeface="Calibri" pitchFamily="34" charset="-120"/>
+              </a:rPr>
+              <a:t>SPRING AI FOR BEGINNERS  /  04 Tool Calling</a:t>
+            </a:r>
+            <a:endParaRPr lang="en-US" sz="1050" dirty="0"/>
+          </a:p>
+        </p:txBody>
+      </p:sp>
+      <p:sp>
+        <p:nvSpPr>
+          <p:cNvPr id="10" name="Text 7"/>
+          <p:cNvSpPr/>
+          <p:nvPr/>
+        </p:nvSpPr>
+        <p:spPr>
+          <a:xfrm>
+            <a:off x="10817352" y="6373368"/>
+            <a:ext cx="822960" cy="256032"/>
+          </a:xfrm>
+          <a:prstGeom prst="rect">
+            <a:avLst/>
+          </a:prstGeom>
+          <a:noFill/>
+          <a:ln/>
+        </p:spPr>
+        <p:txBody>
+          <a:bodyPr wrap="square" lIns="0" tIns="0" rIns="0" bIns="0" rtlCol="0" anchor="t"/>
+          <a:lstStyle/>
+          <a:p>
+            <a:pPr marL="0" indent="0" algn="r">
+              <a:buNone/>
+            </a:pPr>
+            <a:r>
+              <a:rPr lang="en-US" sz="1200" dirty="0">
+                <a:solidFill>
+                  <a:srgbClr val="B9CBB9"/>
+                </a:solidFill>
+                <a:latin typeface="Calibri" pitchFamily="34" charset="0"/>
+                <a:ea typeface="Calibri" pitchFamily="34" charset="-122"/>
+                <a:cs typeface="Calibri" pitchFamily="34" charset="-120"/>
+              </a:rPr>
+              <a:t>20 / 20</a:t>
+            </a:r>
+            <a:endParaRPr lang="en-US" sz="1200" dirty="0"/>
+          </a:p>
+        </p:txBody>
+      </p:sp>
+      <p:sp>
+        <p:nvSpPr>
+          <p:cNvPr id="12" name="Text 1">
+            <a:extLst>
+              <a:ext uri="{FF2B5EF4-FFF2-40B4-BE49-F238E27FC236}">
+                <a16:creationId xmlns:a16="http://schemas.microsoft.com/office/drawing/2014/main" id="{2D9A3FC6-0F5F-5E19-CB31-B5DAE40AF834}"/>
+              </a:ext>
+            </a:extLst>
+          </p:cNvPr>
+          <p:cNvSpPr/>
+          <p:nvPr/>
+        </p:nvSpPr>
+        <p:spPr>
+          <a:xfrm>
+            <a:off x="645232" y="2888731"/>
+            <a:ext cx="1615011" cy="678201"/>
           </a:xfrm>
           <a:prstGeom prst="rect">
             <a:avLst/>
@@ -11813,132 +11468,21 @@
                 <a:ea typeface="Trebuchet MS" pitchFamily="34" charset="-122"/>
                 <a:cs typeface="Trebuchet MS" pitchFamily="34" charset="-120"/>
               </a:rPr>
-              <a:t>Add one small, testable Java tool</a:t>
+              <a:t>Demo</a:t>
             </a:r>
             <a:endParaRPr lang="en-US" sz="4000" dirty="0"/>
-          </a:p>
-        </p:txBody>
-      </p:sp>
-      <p:sp>
-        <p:nvSpPr>
-          <p:cNvPr id="4" name="Text 2"/>
-          <p:cNvSpPr/>
-          <p:nvPr/>
-        </p:nvSpPr>
-        <p:spPr>
-          <a:xfrm>
-            <a:off x="548640" y="2423160"/>
-            <a:ext cx="4572000" cy="850392"/>
-          </a:xfrm>
-          <a:prstGeom prst="rect">
-            <a:avLst/>
-          </a:prstGeom>
-          <a:noFill/>
-          <a:ln/>
-        </p:spPr>
-        <p:txBody>
-          <a:bodyPr wrap="square" lIns="0" tIns="0" rIns="0" bIns="0" rtlCol="0" anchor="t"/>
-          <a:lstStyle/>
-          <a:p>
-            <a:pPr marL="0" indent="0">
-              <a:buNone/>
-            </a:pPr>
-            <a:r>
-              <a:rPr lang="en-US" sz="2100" dirty="0">
-                <a:solidFill>
-                  <a:srgbClr val="FFFFFF"/>
-                </a:solidFill>
-                <a:latin typeface="Calibri" pitchFamily="34" charset="0"/>
-                <a:ea typeface="Calibri" pitchFamily="34" charset="-122"/>
-                <a:cs typeface="Calibri" pitchFamily="34" charset="-120"/>
-              </a:rPr>
-              <a:t>Choose a read-only operation with clear inputs.</a:t>
-            </a:r>
-            <a:endParaRPr lang="en-US" sz="2100" dirty="0"/>
-          </a:p>
-        </p:txBody>
-      </p:sp>
-      <p:sp>
-        <p:nvSpPr>
-          <p:cNvPr id="5" name="Text 3"/>
-          <p:cNvSpPr/>
-          <p:nvPr/>
-        </p:nvSpPr>
-        <p:spPr>
-          <a:xfrm>
-            <a:off x="548640" y="3410712"/>
-            <a:ext cx="4572000" cy="850392"/>
-          </a:xfrm>
-          <a:prstGeom prst="rect">
-            <a:avLst/>
-          </a:prstGeom>
-          <a:noFill/>
-          <a:ln/>
-        </p:spPr>
-        <p:txBody>
-          <a:bodyPr wrap="square" lIns="0" tIns="0" rIns="0" bIns="0" rtlCol="0" anchor="t"/>
-          <a:lstStyle/>
-          <a:p>
-            <a:pPr marL="0" indent="0">
-              <a:buNone/>
-            </a:pPr>
-            <a:r>
-              <a:rPr lang="en-US" sz="2100" dirty="0">
-                <a:solidFill>
-                  <a:srgbClr val="FFFFFF"/>
-                </a:solidFill>
-                <a:latin typeface="Calibri" pitchFamily="34" charset="0"/>
-                <a:ea typeface="Calibri" pitchFamily="34" charset="-122"/>
-                <a:cs typeface="Calibri" pitchFamily="34" charset="-120"/>
-              </a:rPr>
-              <a:t>Add @Tool, parameter descriptions, and validation.</a:t>
-            </a:r>
-            <a:endParaRPr lang="en-US" sz="2100" dirty="0"/>
-          </a:p>
-        </p:txBody>
-      </p:sp>
-      <p:sp>
-        <p:nvSpPr>
-          <p:cNvPr id="6" name="Text 4"/>
-          <p:cNvSpPr/>
-          <p:nvPr/>
-        </p:nvSpPr>
-        <p:spPr>
-          <a:xfrm>
-            <a:off x="548640" y="4398264"/>
-            <a:ext cx="4572000" cy="850392"/>
-          </a:xfrm>
-          <a:prstGeom prst="rect">
-            <a:avLst/>
-          </a:prstGeom>
-          <a:noFill/>
-          <a:ln/>
-        </p:spPr>
-        <p:txBody>
-          <a:bodyPr wrap="square" lIns="0" tIns="0" rIns="0" bIns="0" rtlCol="0" anchor="t"/>
-          <a:lstStyle/>
-          <a:p>
-            <a:pPr marL="0" indent="0">
-              <a:buNone/>
-            </a:pPr>
-            <a:r>
-              <a:rPr lang="en-US" sz="2100" dirty="0">
-                <a:solidFill>
-                  <a:srgbClr val="FFFFFF"/>
-                </a:solidFill>
-                <a:latin typeface="Calibri" pitchFamily="34" charset="0"/>
-                <a:ea typeface="Calibri" pitchFamily="34" charset="-122"/>
-                <a:cs typeface="Calibri" pitchFamily="34" charset="-120"/>
-              </a:rPr>
-              <a:t>Register it, test its Java logic, and inspect real invocations.</a:t>
-            </a:r>
-            <a:endParaRPr lang="en-US" sz="2100" dirty="0"/>
           </a:p>
         </p:txBody>
       </p:sp>
       <p:pic>
         <p:nvPicPr>
-          <p:cNvPr id="7" name="Image 0" descr="tools conversation demo"/>
+          <p:cNvPr id="14" name="Picture 13" descr="QR Code">
+            <a:extLst>
+              <a:ext uri="{FF2B5EF4-FFF2-40B4-BE49-F238E27FC236}">
+                <a16:creationId xmlns:a16="http://schemas.microsoft.com/office/drawing/2014/main" id="{DF4977DB-D08F-658E-5FA6-CDE62034A97D}"/>
+              </a:ext>
+            </a:extLst>
+          </p:cNvPr>
           <p:cNvPicPr>
             <a:picLocks noChangeAspect="1"/>
           </p:cNvPicPr>
@@ -11952,8 +11496,8 @@
         </p:blipFill>
         <p:spPr>
           <a:xfrm>
-            <a:off x="5486400" y="2915706"/>
-            <a:ext cx="6153912" cy="2087292"/>
+            <a:off x="3574694" y="675763"/>
+            <a:ext cx="5143500" cy="5143500"/>
           </a:xfrm>
           <a:prstGeom prst="rect">
             <a:avLst/>
@@ -11962,118 +11506,40 @@
       </p:pic>
       <p:sp>
         <p:nvSpPr>
-          <p:cNvPr id="8" name="Text 5"/>
-          <p:cNvSpPr/>
-          <p:nvPr/>
-        </p:nvSpPr>
-        <p:spPr>
-          <a:xfrm>
-            <a:off x="548640" y="5815584"/>
-            <a:ext cx="11064240" cy="448056"/>
-          </a:xfrm>
-          <a:prstGeom prst="rect">
-            <a:avLst/>
-          </a:prstGeom>
-          <a:noFill/>
-          <a:ln/>
-        </p:spPr>
-        <p:txBody>
-          <a:bodyPr wrap="square" lIns="0" tIns="0" rIns="0" bIns="0" rtlCol="0" anchor="t"/>
-          <a:lstStyle/>
-          <a:p>
-            <a:pPr marL="0" indent="0">
-              <a:buNone/>
-            </a:pPr>
-            <a:r>
-              <a:rPr lang="en-US" sz="1800" b="1" dirty="0">
-                <a:solidFill>
-                  <a:srgbClr val="86CF54"/>
-                </a:solidFill>
-                <a:latin typeface="Calibri" pitchFamily="34" charset="0"/>
-                <a:ea typeface="Calibri" pitchFamily="34" charset="-122"/>
-                <a:cs typeface="Calibri" pitchFamily="34" charset="-120"/>
-              </a:rPr>
-              <a:t>Next: share tool capabilities across processes with Spring AI and MCP.</a:t>
-            </a:r>
-            <a:endParaRPr lang="en-US" sz="1800" dirty="0"/>
-          </a:p>
-        </p:txBody>
-      </p:sp>
-      <p:sp>
-        <p:nvSpPr>
-          <p:cNvPr id="9" name="Text 6"/>
-          <p:cNvSpPr/>
-          <p:nvPr/>
-        </p:nvSpPr>
-        <p:spPr>
-          <a:xfrm>
-            <a:off x="548640" y="6400800"/>
-            <a:ext cx="9875520" cy="210312"/>
-          </a:xfrm>
-          <a:prstGeom prst="rect">
-            <a:avLst/>
-          </a:prstGeom>
-          <a:noFill/>
-          <a:ln/>
-        </p:spPr>
-        <p:txBody>
-          <a:bodyPr wrap="square" lIns="0" tIns="0" rIns="0" bIns="0" rtlCol="0" anchor="t"/>
-          <a:lstStyle/>
-          <a:p>
-            <a:pPr marL="0" indent="0">
-              <a:buNone/>
-            </a:pPr>
-            <a:r>
-              <a:rPr lang="en-US" sz="1050" dirty="0">
-                <a:solidFill>
-                  <a:srgbClr val="B9CBB9"/>
-                </a:solidFill>
-                <a:latin typeface="Calibri" pitchFamily="34" charset="0"/>
-                <a:ea typeface="Calibri" pitchFamily="34" charset="-122"/>
-                <a:cs typeface="Calibri" pitchFamily="34" charset="-120"/>
-              </a:rPr>
-              <a:t>SPRING AI FOR BEGINNERS  /  04 Tool Calling</a:t>
-            </a:r>
-            <a:endParaRPr lang="en-US" sz="1050" dirty="0"/>
-          </a:p>
-        </p:txBody>
-      </p:sp>
-      <p:sp>
-        <p:nvSpPr>
-          <p:cNvPr id="10" name="Text 7"/>
-          <p:cNvSpPr/>
-          <p:nvPr/>
-        </p:nvSpPr>
-        <p:spPr>
-          <a:xfrm>
-            <a:off x="10817352" y="6373368"/>
-            <a:ext cx="822960" cy="256032"/>
-          </a:xfrm>
-          <a:prstGeom prst="rect">
-            <a:avLst/>
-          </a:prstGeom>
-          <a:noFill/>
-          <a:ln/>
-        </p:spPr>
-        <p:txBody>
-          <a:bodyPr wrap="square" lIns="0" tIns="0" rIns="0" bIns="0" rtlCol="0" anchor="t"/>
-          <a:lstStyle/>
-          <a:p>
-            <a:pPr marL="0" indent="0" algn="r">
-              <a:buNone/>
-            </a:pPr>
-            <a:r>
-              <a:rPr lang="en-US" sz="1200" dirty="0">
-                <a:solidFill>
-                  <a:srgbClr val="B9CBB9"/>
-                </a:solidFill>
-                <a:latin typeface="Calibri" pitchFamily="34" charset="0"/>
-                <a:ea typeface="Calibri" pitchFamily="34" charset="-122"/>
-                <a:cs typeface="Calibri" pitchFamily="34" charset="-120"/>
-              </a:rPr>
-              <a:t>20 / 20</a:t>
-            </a:r>
-            <a:endParaRPr lang="en-US" sz="1200" dirty="0"/>
+          <p:cNvPr id="16" name="TextBox 15">
+            <a:extLst>
+              <a:ext uri="{FF2B5EF4-FFF2-40B4-BE49-F238E27FC236}">
+                <a16:creationId xmlns:a16="http://schemas.microsoft.com/office/drawing/2014/main" id="{E1D46BE0-5F02-F4A1-571F-E57B4680E491}"/>
+              </a:ext>
+            </a:extLst>
+          </p:cNvPr>
+          <p:cNvSpPr txBox="1"/>
+          <p:nvPr/>
+        </p:nvSpPr>
+        <p:spPr>
+          <a:xfrm>
+            <a:off x="2869576" y="5816025"/>
+            <a:ext cx="6553736" cy="584775"/>
+          </a:xfrm>
+          <a:prstGeom prst="rect">
+            <a:avLst/>
+          </a:prstGeom>
+          <a:noFill/>
+        </p:spPr>
+        <p:txBody>
+          <a:bodyPr wrap="square">
+            <a:spAutoFit/>
+          </a:bodyPr>
+          <a:lstStyle/>
+          <a:p>
+            <a:r>
+              <a:rPr lang="en-ZA" sz="3200" dirty="0">
+                <a:solidFill>
+                  <a:schemeClr val="bg2"/>
+                </a:solidFill>
+              </a:rPr>
+              <a:t>http://aka.ms/Spring-AI-for-Beginners</a:t>
+            </a:r>
           </a:p>
         </p:txBody>
       </p:sp>
@@ -12538,45 +12004,6 @@
           </a:p>
         </p:txBody>
       </p:sp>
-      <p:sp>
-        <p:nvSpPr>
-          <p:cNvPr id="14" name="Text 10"/>
-          <p:cNvSpPr/>
-          <p:nvPr/>
-        </p:nvSpPr>
-        <p:spPr>
-          <a:xfrm>
-            <a:off x="548640" y="5815584"/>
-            <a:ext cx="11064240" cy="448056"/>
-          </a:xfrm>
-          <a:prstGeom prst="rect">
-            <a:avLst/>
-          </a:prstGeom>
-          <a:noFill/>
-          <a:ln/>
-        </p:spPr>
-        <p:txBody>
-          <a:bodyPr wrap="square" lIns="0" tIns="0" rIns="0" bIns="0" rtlCol="0" anchor="t"/>
-          <a:lstStyle/>
-          <a:p>
-            <a:pPr marL="0" indent="0">
-              <a:buNone/>
-            </a:pPr>
-            <a:r>
-              <a:rPr lang="en-US" sz="1800" b="1" dirty="0">
-                <a:solidFill>
-                  <a:srgbClr val="397C25"/>
-                </a:solidFill>
-                <a:latin typeface="Calibri" pitchFamily="34" charset="0"/>
-                <a:ea typeface="Calibri" pitchFamily="34" charset="-122"/>
-                <a:cs typeface="Calibri" pitchFamily="34" charset="-120"/>
-              </a:rPr>
-              <a:t>Use the Tools run metadata, not the model's narration, as invocation evidence.</a:t>
-            </a:r>
-            <a:endParaRPr lang="en-US" sz="1800" dirty="0"/>
-          </a:p>
-        </p:txBody>
-      </p:sp>
     </p:spTree>
   </p:cSld>
   <p:clrMapOvr>
@@ -13819,45 +13246,6 @@
           </a:p>
         </p:txBody>
       </p:sp>
-      <p:sp>
-        <p:nvSpPr>
-          <p:cNvPr id="37" name="Text 34"/>
-          <p:cNvSpPr/>
-          <p:nvPr/>
-        </p:nvSpPr>
-        <p:spPr>
-          <a:xfrm>
-            <a:off x="548640" y="5815584"/>
-            <a:ext cx="11064240" cy="448056"/>
-          </a:xfrm>
-          <a:prstGeom prst="rect">
-            <a:avLst/>
-          </a:prstGeom>
-          <a:noFill/>
-          <a:ln/>
-        </p:spPr>
-        <p:txBody>
-          <a:bodyPr wrap="square" lIns="0" tIns="0" rIns="0" bIns="0" rtlCol="0" anchor="t"/>
-          <a:lstStyle/>
-          <a:p>
-            <a:pPr marL="0" indent="0">
-              <a:buNone/>
-            </a:pPr>
-            <a:r>
-              <a:rPr lang="en-US" sz="1800" b="1" dirty="0">
-                <a:solidFill>
-                  <a:srgbClr val="397C25"/>
-                </a:solidFill>
-                <a:latin typeface="Calibri" pitchFamily="34" charset="0"/>
-                <a:ea typeface="Calibri" pitchFamily="34" charset="-122"/>
-                <a:cs typeface="Calibri" pitchFamily="34" charset="-120"/>
-              </a:rPr>
-              <a:t>Repeat the tool request, execution, and result steps for each additional tool the model selects.</a:t>
-            </a:r>
-            <a:endParaRPr lang="en-US" sz="1800" dirty="0"/>
-          </a:p>
-        </p:txBody>
-      </p:sp>
     </p:spTree>
   </p:cSld>
   <p:clrMapOvr>
@@ -14970,45 +14358,6 @@
           </a:p>
         </p:txBody>
       </p:sp>
-      <p:sp>
-        <p:nvSpPr>
-          <p:cNvPr id="33" name="Text 30"/>
-          <p:cNvSpPr/>
-          <p:nvPr/>
-        </p:nvSpPr>
-        <p:spPr>
-          <a:xfrm>
-            <a:off x="548640" y="5815584"/>
-            <a:ext cx="11064240" cy="448056"/>
-          </a:xfrm>
-          <a:prstGeom prst="rect">
-            <a:avLst/>
-          </a:prstGeom>
-          <a:noFill/>
-          <a:ln/>
-        </p:spPr>
-        <p:txBody>
-          <a:bodyPr wrap="square" lIns="0" tIns="0" rIns="0" bIns="0" rtlCol="0" anchor="t"/>
-          <a:lstStyle/>
-          <a:p>
-            <a:pPr marL="0" indent="0">
-              <a:buNone/>
-            </a:pPr>
-            <a:r>
-              <a:rPr lang="en-US" sz="1800" b="1" dirty="0">
-                <a:solidFill>
-                  <a:srgbClr val="397C25"/>
-                </a:solidFill>
-                <a:latin typeface="Calibri" pitchFamily="34" charset="0"/>
-                <a:ea typeface="Calibri" pitchFamily="34" charset="-122"/>
-                <a:cs typeface="Calibri" pitchFamily="34" charset="-120"/>
-              </a:rPr>
-              <a:t>The actual parameter is fahrenheit. Java computes and formats the result before the model answers.</a:t>
-            </a:r>
-            <a:endParaRPr lang="en-US" sz="1800" dirty="0"/>
-          </a:p>
-        </p:txBody>
-      </p:sp>
     </p:spTree>
   </p:cSld>
   <p:clrMapOvr>
@@ -15667,45 +15016,6 @@
           </a:p>
         </p:txBody>
       </p:sp>
-      <p:sp>
-        <p:nvSpPr>
-          <p:cNvPr id="15" name="Text 13"/>
-          <p:cNvSpPr/>
-          <p:nvPr/>
-        </p:nvSpPr>
-        <p:spPr>
-          <a:xfrm>
-            <a:off x="548640" y="5815584"/>
-            <a:ext cx="11064240" cy="448056"/>
-          </a:xfrm>
-          <a:prstGeom prst="rect">
-            <a:avLst/>
-          </a:prstGeom>
-          <a:noFill/>
-          <a:ln/>
-        </p:spPr>
-        <p:txBody>
-          <a:bodyPr wrap="square" lIns="0" tIns="0" rIns="0" bIns="0" rtlCol="0" anchor="t"/>
-          <a:lstStyle/>
-          <a:p>
-            <a:pPr marL="0" indent="0">
-              <a:buNone/>
-            </a:pPr>
-            <a:r>
-              <a:rPr lang="en-US" sz="1800" b="1" dirty="0">
-                <a:solidFill>
-                  <a:srgbClr val="397C25"/>
-                </a:solidFill>
-                <a:latin typeface="Calibri" pitchFamily="34" charset="0"/>
-                <a:ea typeface="Calibri" pitchFamily="34" charset="-122"/>
-                <a:cs typeface="Calibri" pitchFamily="34" charset="-120"/>
-              </a:rPr>
-              <a:t>Annotated methods are exposed only when their instances are registered for a request.</a:t>
-            </a:r>
-            <a:endParaRPr lang="en-US" sz="1800" dirty="0"/>
-          </a:p>
-        </p:txBody>
-      </p:sp>
     </p:spTree>
   </p:cSld>
   <p:clrMapOvr>
@@ -16344,45 +15654,6 @@
           </a:p>
         </p:txBody>
       </p:sp>
-      <p:sp>
-        <p:nvSpPr>
-          <p:cNvPr id="15" name="Text 13"/>
-          <p:cNvSpPr/>
-          <p:nvPr/>
-        </p:nvSpPr>
-        <p:spPr>
-          <a:xfrm>
-            <a:off x="548640" y="5815584"/>
-            <a:ext cx="11064240" cy="448056"/>
-          </a:xfrm>
-          <a:prstGeom prst="rect">
-            <a:avLst/>
-          </a:prstGeom>
-          <a:noFill/>
-          <a:ln/>
-        </p:spPr>
-        <p:txBody>
-          <a:bodyPr wrap="square" lIns="0" tIns="0" rIns="0" bIns="0" rtlCol="0" anchor="t"/>
-          <a:lstStyle/>
-          <a:p>
-            <a:pPr marL="0" indent="0">
-              <a:buNone/>
-            </a:pPr>
-            <a:r>
-              <a:rPr lang="en-US" sz="1800" b="1" dirty="0">
-                <a:solidFill>
-                  <a:srgbClr val="397C25"/>
-                </a:solidFill>
-                <a:latin typeface="Calibri" pitchFamily="34" charset="0"/>
-                <a:ea typeface="Calibri" pitchFamily="34" charset="-122"/>
-                <a:cs typeface="Calibri" pitchFamily="34" charset="-120"/>
-              </a:rPr>
-              <a:t>Clear units and unambiguous descriptions reduce incorrect tool selection.</a:t>
-            </a:r>
-            <a:endParaRPr lang="en-US" sz="1800" dirty="0"/>
-          </a:p>
-        </p:txBody>
-      </p:sp>
     </p:spTree>
   </p:cSld>
   <p:clrMapOvr>
@@ -16596,45 +15867,6 @@
           </a:prstGeom>
         </p:spPr>
       </p:pic>
-      <p:sp>
-        <p:nvSpPr>
-          <p:cNvPr id="7" name="Text 4"/>
-          <p:cNvSpPr/>
-          <p:nvPr/>
-        </p:nvSpPr>
-        <p:spPr>
-          <a:xfrm>
-            <a:off x="548640" y="5815584"/>
-            <a:ext cx="11064240" cy="448056"/>
-          </a:xfrm>
-          <a:prstGeom prst="rect">
-            <a:avLst/>
-          </a:prstGeom>
-          <a:noFill/>
-          <a:ln/>
-        </p:spPr>
-        <p:txBody>
-          <a:bodyPr wrap="square" lIns="0" tIns="0" rIns="0" bIns="0" rtlCol="0" anchor="t"/>
-          <a:lstStyle/>
-          <a:p>
-            <a:pPr marL="0" indent="0">
-              <a:buNone/>
-            </a:pPr>
-            <a:r>
-              <a:rPr lang="en-US" sz="1800" b="1" dirty="0">
-                <a:solidFill>
-                  <a:srgbClr val="397C25"/>
-                </a:solidFill>
-                <a:latin typeface="Calibri" pitchFamily="34" charset="0"/>
-                <a:ea typeface="Calibri" pitchFamily="34" charset="-122"/>
-                <a:cs typeface="Calibri" pitchFamily="34" charset="-120"/>
-              </a:rPr>
-              <a:t>For weather in Tokyo, the current-weather tool fits. Selection is still model behavior.</a:t>
-            </a:r>
-            <a:endParaRPr lang="en-US" sz="1800" dirty="0"/>
-          </a:p>
-        </p:txBody>
-      </p:sp>
     </p:spTree>
   </p:cSld>
   <p:clrMapOvr>
@@ -17250,45 +16482,6 @@
               <a:t>Spring AI dispatches calls and returns results.</a:t>
             </a:r>
             <a:endParaRPr lang="en-US" sz="1900" dirty="0"/>
-          </a:p>
-        </p:txBody>
-      </p:sp>
-      <p:sp>
-        <p:nvSpPr>
-          <p:cNvPr id="15" name="Text 13"/>
-          <p:cNvSpPr/>
-          <p:nvPr/>
-        </p:nvSpPr>
-        <p:spPr>
-          <a:xfrm>
-            <a:off x="548640" y="5815584"/>
-            <a:ext cx="11064240" cy="448056"/>
-          </a:xfrm>
-          <a:prstGeom prst="rect">
-            <a:avLst/>
-          </a:prstGeom>
-          <a:noFill/>
-          <a:ln/>
-        </p:spPr>
-        <p:txBody>
-          <a:bodyPr wrap="square" lIns="0" tIns="0" rIns="0" bIns="0" rtlCol="0" anchor="t"/>
-          <a:lstStyle/>
-          <a:p>
-            <a:pPr marL="0" indent="0">
-              <a:buNone/>
-            </a:pPr>
-            <a:r>
-              <a:rPr lang="en-US" sz="1800" b="1" dirty="0">
-                <a:solidFill>
-                  <a:srgbClr val="397C25"/>
-                </a:solidFill>
-                <a:latin typeface="Calibri" pitchFamily="34" charset="0"/>
-                <a:ea typeface="Calibri" pitchFamily="34" charset="-122"/>
-                <a:cs typeface="Calibri" pitchFamily="34" charset="-120"/>
-              </a:rPr>
-              <a:t>AgentService does not manually parse tool-call JSON or invoke methods by name.</a:t>
-            </a:r>
-            <a:endParaRPr lang="en-US" sz="1800" dirty="0"/>
           </a:p>
         </p:txBody>
       </p:sp>
